--- a/reports/colombia_eq_20260810/output/ADRC_EQ_COL_Choco_20260810_JA.pptx
+++ b/reports/colombia_eq_20260810/output/ADRC_EQ_COL_Choco_20260810_JA.pptx
@@ -3719,8 +3719,8 @@
         </p:nvSpPr>
         <p:spPr>
           <a:xfrm>
-            <a:off x="0" y="4791456"/>
-            <a:ext cx="12188952" cy="1371600"/>
+            <a:off x="0" y="4663440"/>
+            <a:ext cx="12188952" cy="1499616"/>
           </a:xfrm>
           <a:prstGeom prst="rect">
             <a:avLst/>
@@ -3744,8 +3744,8 @@
         </p:nvSpPr>
         <p:spPr>
           <a:xfrm>
-            <a:off x="457200" y="4873752"/>
-            <a:ext cx="11274552" cy="1207008"/>
+            <a:off x="457200" y="4745736"/>
+            <a:ext cx="11274552" cy="1335024"/>
           </a:xfrm>
           <a:prstGeom prst="rect">
             <a:avLst/>
@@ -11286,7 +11286,7 @@
                           <a:ea typeface="Meiryo" pitchFamily="34" charset="-122"/>
                           <a:cs typeface="Meiryo" pitchFamily="34" charset="-120"/>
                         </a:rPr>
-                        <a:t>Reported / confirming</a:t>
+                        <a:t>報道あり・確認中</a:t>
                       </a:r>
                       <a:endParaRPr lang="en-US" sz="900" dirty="0">
                         <a:latin typeface="Meiryo" charset="0"/>
@@ -11560,7 +11560,7 @@
                           <a:ea typeface="Meiryo" pitchFamily="34" charset="-122"/>
                           <a:cs typeface="Meiryo" pitchFamily="34" charset="-120"/>
                         </a:rPr>
-                        <a:t>Reported / confirming</a:t>
+                        <a:t>報道あり・確認中</a:t>
                       </a:r>
                       <a:endParaRPr lang="en-US" sz="900" dirty="0">
                         <a:latin typeface="Meiryo" charset="0"/>
@@ -11834,7 +11834,7 @@
                           <a:ea typeface="Meiryo" pitchFamily="34" charset="-122"/>
                           <a:cs typeface="Meiryo" pitchFamily="34" charset="-120"/>
                         </a:rPr>
-                        <a:t>Published</a:t>
+                        <a:t>公開済み</a:t>
                       </a:r>
                       <a:endParaRPr lang="en-US" sz="900" dirty="0">
                         <a:latin typeface="Meiryo" charset="0"/>
@@ -12108,7 +12108,7 @@
                           <a:ea typeface="Meiryo" pitchFamily="34" charset="-122"/>
                           <a:cs typeface="Meiryo" pitchFamily="34" charset="-120"/>
                         </a:rPr>
-                        <a:t>Published</a:t>
+                        <a:t>公開済み</a:t>
                       </a:r>
                       <a:endParaRPr lang="en-US" sz="900" dirty="0">
                         <a:latin typeface="Meiryo" charset="0"/>
@@ -12382,7 +12382,7 @@
                           <a:ea typeface="Meiryo" pitchFamily="34" charset="-122"/>
                           <a:cs typeface="Meiryo" pitchFamily="34" charset="-120"/>
                         </a:rPr>
-                        <a:t>Published</a:t>
+                        <a:t>公開済み</a:t>
                       </a:r>
                       <a:endParaRPr lang="en-US" sz="900" dirty="0">
                         <a:latin typeface="Meiryo" charset="0"/>
@@ -12656,7 +12656,7 @@
                           <a:ea typeface="Meiryo" pitchFamily="34" charset="-122"/>
                           <a:cs typeface="Meiryo" pitchFamily="34" charset="-120"/>
                         </a:rPr>
-                        <a:t>n/a</a:t>
+                        <a:t>対象外</a:t>
                       </a:r>
                       <a:endParaRPr lang="en-US" sz="900" dirty="0">
                         <a:latin typeface="Meiryo" charset="0"/>
@@ -26306,7 +26306,7 @@
                 <a:ea typeface="Meiryo" pitchFamily="34" charset="-122"/>
                 <a:cs typeface="Meiryo" pitchFamily="34" charset="-120"/>
               </a:rPr>
-              <a:t>10 Aug 2026, 07:34 COT (UTC-5)  (10 Aug 2026, 12:34 UTC / 10 Aug 2026, 21:34 JST)    |    Mww 7.4    |    深さ 107 km    |    改正メルカリ震度 MMI VII（非常に強い）／USGS ShakeMap</a:t>
+              <a:t>2026年8月10日 07:34（コロンビア時間、UTC-5）  (2026年8月10日 12:34（UTC） / 2026年8月10日 21:34（日本時間）)    |    Mww 7.4    |    深さ 107 km    |    改正メルカリ震度 MMI VII（非常に強い）／USGS ShakeMap</a:t>
             </a:r>
             <a:endParaRPr lang="en-US" sz="1150" dirty="0"/>
           </a:p>
@@ -27409,7 +27409,7 @@
                           <a:ea typeface="Meiryo" pitchFamily="34" charset="-122"/>
                           <a:cs typeface="Meiryo" pitchFamily="34" charset="-120"/>
                         </a:rPr>
-                        <a:t>USGS / SGC</a:t>
+                        <a:t>USGS／SGC</a:t>
                       </a:r>
                       <a:endParaRPr lang="en-US" sz="850" dirty="0">
                         <a:latin typeface="Meiryo" charset="0"/>
@@ -27685,7 +27685,7 @@
                           <a:ea typeface="Meiryo" pitchFamily="34" charset="-122"/>
                           <a:cs typeface="Meiryo" pitchFamily="34" charset="-120"/>
                         </a:rPr>
-                        <a:t>Morning</a:t>
+                        <a:t>午前</a:t>
                       </a:r>
                       <a:endParaRPr lang="en-US" sz="1000" dirty="0">
                         <a:latin typeface="Meiryo" charset="0"/>
@@ -27891,7 +27891,7 @@
                           <a:ea typeface="Meiryo" pitchFamily="34" charset="-122"/>
                           <a:cs typeface="Meiryo" pitchFamily="34" charset="-120"/>
                         </a:rPr>
-                        <a:t>Morning</a:t>
+                        <a:t>午前</a:t>
                       </a:r>
                       <a:endParaRPr lang="en-US" sz="1000" dirty="0">
                         <a:latin typeface="Meiryo" charset="0"/>
@@ -28027,7 +28027,7 @@
                           <a:ea typeface="Meiryo" pitchFamily="34" charset="-122"/>
                           <a:cs typeface="Meiryo" pitchFamily="34" charset="-120"/>
                         </a:rPr>
-                        <a:t>Mayor of Cali</a:t>
+                        <a:t>カリ市長</a:t>
                       </a:r>
                       <a:endParaRPr lang="en-US" sz="850" dirty="0">
                         <a:latin typeface="Meiryo" charset="0"/>
@@ -28097,7 +28097,7 @@
                           <a:ea typeface="Meiryo" pitchFamily="34" charset="-122"/>
                           <a:cs typeface="Meiryo" pitchFamily="34" charset="-120"/>
                         </a:rPr>
-                        <a:t>Morning</a:t>
+                        <a:t>午前</a:t>
                       </a:r>
                       <a:endParaRPr lang="en-US" sz="1000" dirty="0">
                         <a:latin typeface="Meiryo" charset="0"/>
@@ -28233,7 +28233,7 @@
                           <a:ea typeface="Meiryo" pitchFamily="34" charset="-122"/>
                           <a:cs typeface="Meiryo" pitchFamily="34" charset="-120"/>
                         </a:rPr>
-                        <a:t>Mayor of Manizales</a:t>
+                        <a:t>マニサレス市長</a:t>
                       </a:r>
                       <a:endParaRPr lang="en-US" sz="850" dirty="0">
                         <a:latin typeface="Meiryo" charset="0"/>
@@ -28303,7 +28303,7 @@
                           <a:ea typeface="Meiryo" pitchFamily="34" charset="-122"/>
                           <a:cs typeface="Meiryo" pitchFamily="34" charset="-120"/>
                         </a:rPr>
-                        <a:t>Morning</a:t>
+                        <a:t>午前</a:t>
                       </a:r>
                       <a:endParaRPr lang="en-US" sz="1000" dirty="0">
                         <a:latin typeface="Meiryo" charset="0"/>
@@ -28439,7 +28439,7 @@
                           <a:ea typeface="Meiryo" pitchFamily="34" charset="-122"/>
                           <a:cs typeface="Meiryo" pitchFamily="34" charset="-120"/>
                         </a:rPr>
-                        <a:t>Aerocivil / media</a:t>
+                        <a:t>民間航空当局／報道</a:t>
                       </a:r>
                       <a:endParaRPr lang="en-US" sz="850" dirty="0">
                         <a:latin typeface="Meiryo" charset="0"/>
@@ -28509,7 +28509,7 @@
                           <a:ea typeface="Meiryo" pitchFamily="34" charset="-122"/>
                           <a:cs typeface="Meiryo" pitchFamily="34" charset="-120"/>
                         </a:rPr>
-                        <a:t>Daytime</a:t>
+                        <a:t>日中</a:t>
                       </a:r>
                       <a:endParaRPr lang="en-US" sz="1000" dirty="0">
                         <a:latin typeface="Meiryo" charset="0"/>
@@ -28645,7 +28645,7 @@
                           <a:ea typeface="Meiryo" pitchFamily="34" charset="-122"/>
                           <a:cs typeface="Meiryo" pitchFamily="34" charset="-120"/>
                         </a:rPr>
-                        <a:t>Government</a:t>
+                        <a:t>政府</a:t>
                       </a:r>
                       <a:endParaRPr lang="en-US" sz="850" dirty="0">
                         <a:latin typeface="Meiryo" charset="0"/>
@@ -29356,7 +29356,7 @@
                           <a:ea typeface="Meiryo" pitchFamily="34" charset="-122"/>
                           <a:cs typeface="Meiryo" pitchFamily="34" charset="-120"/>
                         </a:rPr>
-                        <a:t>Daytime</a:t>
+                        <a:t>日中</a:t>
                       </a:r>
                       <a:endParaRPr lang="en-US" sz="1000" dirty="0">
                         <a:latin typeface="Meiryo" charset="0"/>
@@ -29562,7 +29562,7 @@
                           <a:ea typeface="Meiryo" pitchFamily="34" charset="-122"/>
                           <a:cs typeface="Meiryo" pitchFamily="34" charset="-120"/>
                         </a:rPr>
-                        <a:t>Daytime</a:t>
+                        <a:t>日中</a:t>
                       </a:r>
                       <a:endParaRPr lang="en-US" sz="1000" dirty="0">
                         <a:latin typeface="Meiryo" charset="0"/>
@@ -29768,7 +29768,7 @@
                           <a:ea typeface="Meiryo" pitchFamily="34" charset="-122"/>
                           <a:cs typeface="Meiryo" pitchFamily="34" charset="-120"/>
                         </a:rPr>
-                        <a:t>Daytime</a:t>
+                        <a:t>日中</a:t>
                       </a:r>
                       <a:endParaRPr lang="en-US" sz="1000" dirty="0">
                         <a:latin typeface="Meiryo" charset="0"/>
@@ -29904,7 +29904,7 @@
                           <a:ea typeface="Meiryo" pitchFamily="34" charset="-122"/>
                           <a:cs typeface="Meiryo" pitchFamily="34" charset="-120"/>
                         </a:rPr>
-                        <a:t>Presidency</a:t>
+                        <a:t>大統領府</a:t>
                       </a:r>
                       <a:endParaRPr lang="en-US" sz="850" dirty="0">
                         <a:latin typeface="Meiryo" charset="0"/>
@@ -29974,7 +29974,7 @@
                           <a:ea typeface="Meiryo" pitchFamily="34" charset="-122"/>
                           <a:cs typeface="Meiryo" pitchFamily="34" charset="-120"/>
                         </a:rPr>
-                        <a:t>Afternoon</a:t>
+                        <a:t>午後</a:t>
                       </a:r>
                       <a:endParaRPr lang="en-US" sz="1000" dirty="0">
                         <a:latin typeface="Meiryo" charset="0"/>
@@ -30110,7 +30110,7 @@
                           <a:ea typeface="Meiryo" pitchFamily="34" charset="-122"/>
                           <a:cs typeface="Meiryo" pitchFamily="34" charset="-120"/>
                         </a:rPr>
-                        <a:t>Presidency / UNGRD</a:t>
+                        <a:t>大統領府／UNGRD</a:t>
                       </a:r>
                       <a:endParaRPr lang="en-US" sz="850" dirty="0">
                         <a:latin typeface="Meiryo" charset="0"/>
@@ -30180,7 +30180,7 @@
                           <a:ea typeface="Meiryo" pitchFamily="34" charset="-122"/>
                           <a:cs typeface="Meiryo" pitchFamily="34" charset="-120"/>
                         </a:rPr>
-                        <a:t>Afternoon</a:t>
+                        <a:t>午後</a:t>
                       </a:r>
                       <a:endParaRPr lang="en-US" sz="1000" dirty="0">
                         <a:latin typeface="Meiryo" charset="0"/>
@@ -30316,7 +30316,7 @@
                           <a:ea typeface="Meiryo" pitchFamily="34" charset="-122"/>
                           <a:cs typeface="Meiryo" pitchFamily="34" charset="-120"/>
                         </a:rPr>
-                        <a:t>International media</a:t>
+                        <a:t>国際報道</a:t>
                       </a:r>
                       <a:endParaRPr lang="en-US" sz="850" dirty="0">
                         <a:latin typeface="Meiryo" charset="0"/>
@@ -30386,7 +30386,7 @@
                           <a:ea typeface="Meiryo" pitchFamily="34" charset="-122"/>
                           <a:cs typeface="Meiryo" pitchFamily="34" charset="-120"/>
                         </a:rPr>
-                        <a:t>Same day</a:t>
+                        <a:t>同日</a:t>
                       </a:r>
                       <a:endParaRPr lang="en-US" sz="1000" dirty="0">
                         <a:latin typeface="Meiryo" charset="0"/>
@@ -30522,7 +30522,7 @@
                           <a:ea typeface="Meiryo" pitchFamily="34" charset="-122"/>
                           <a:cs typeface="Meiryo" pitchFamily="34" charset="-120"/>
                         </a:rPr>
-                        <a:t>Charter / Copernicus</a:t>
+                        <a:t>チャーター／コペルニクス</a:t>
                       </a:r>
                       <a:endParaRPr lang="en-US" sz="850" dirty="0">
                         <a:latin typeface="Meiryo" charset="0"/>
@@ -31110,11 +31110,11 @@
             <a:tbl>
               <a:tblPr/>
               <a:tblGrid>
-                <a:gridCol w="1143000"/>
-                <a:gridCol w="1234440"/>
-                <a:gridCol w="658368"/>
-                <a:gridCol w="457200"/>
-                <a:gridCol w="2724912"/>
+                <a:gridCol w="1298448"/>
+                <a:gridCol w="1152144"/>
+                <a:gridCol w="621792"/>
+                <a:gridCol w="566928"/>
+                <a:gridCol w="2578608"/>
               </a:tblGrid>
               <a:tr h="621792">
                 <a:tc>
@@ -34436,7 +34436,7 @@
                           <a:ea typeface="Meiryo" pitchFamily="34" charset="-122"/>
                           <a:cs typeface="Meiryo" pitchFamily="34" charset="-120"/>
                         </a:rPr>
-                        <a:t>10 Aug 2026, 07:34 COT (UTC-5)</a:t>
+                        <a:t>2026年8月10日 07:34（コロンビア時間、UTC-5）</a:t>
                       </a:r>
                       <a:endParaRPr lang="en-US" sz="950" dirty="0">
                         <a:latin typeface="Meiryo" charset="0"/>
@@ -34574,7 +34574,7 @@
                           <a:ea typeface="Meiryo" pitchFamily="34" charset="-122"/>
                           <a:cs typeface="Meiryo" pitchFamily="34" charset="-120"/>
                         </a:rPr>
-                        <a:t>10 Aug 2026, 12:34 UTC  /  10 Aug 2026, 21:34 JST</a:t>
+                        <a:t>2026年8月10日 12:34（UTC）  /  2026年8月10日 21:34（日本時間）</a:t>
                       </a:r>
                       <a:endParaRPr lang="en-US" sz="950" dirty="0">
                         <a:latin typeface="Meiryo" charset="0"/>

--- a/reports/colombia_eq_20260810/output/ADRC_EQ_COL_Choco_20260810_JA.pptx
+++ b/reports/colombia_eq_20260810/output/ADRC_EQ_COL_Choco_20260810_JA.pptx
@@ -3379,7 +3379,7 @@
                 <a:ea typeface="Meiryo" pitchFamily="34" charset="-122"/>
                 <a:cs typeface="Meiryo" pitchFamily="34" charset="-120"/>
               </a:rPr>
-              <a:t>Mww 7.4   ·   深さ 107 km   ·   改正メルカリ震度 MMI VII（非常に強い）／USGS ShakeMap   ·   GLIDE EQ-2026-XXXXXX-COL (TBC)</a:t>
+              <a:t>Mww 7.4   ·   深さ 107 km   ·   改正メルカリ震度 MMI VII（非常に強い）／USGS ShakeMap   ·   GLIDE EQ-2026-000146-COL</a:t>
             </a:r>
             <a:endParaRPr lang="en-US" sz="1150" dirty="0"/>
           </a:p>
@@ -25337,7 +25337,7 @@
                           <a:ea typeface="Meiryo" pitchFamily="34" charset="-122"/>
                           <a:cs typeface="Meiryo" pitchFamily="34" charset="-120"/>
                         </a:rPr>
-                        <a:t>GLIDE番号（付番後に参照）</a:t>
+                        <a:t>GLIDE番号 — EQ-2026-000146-COL（災害識別番号）</a:t>
                       </a:r>
                       <a:endParaRPr lang="en-US" sz="950" dirty="0">
                         <a:latin typeface="Meiryo" charset="0"/>
@@ -26281,8 +26281,8 @@
         </p:nvSpPr>
         <p:spPr>
           <a:xfrm>
-            <a:off x="365760" y="969264"/>
-            <a:ext cx="11430000" cy="329184"/>
+            <a:off x="365760" y="950976"/>
+            <a:ext cx="11430000" cy="384048"/>
           </a:xfrm>
           <a:prstGeom prst="rect">
             <a:avLst/>
@@ -26306,7 +26306,7 @@
                 <a:ea typeface="Meiryo" pitchFamily="34" charset="-122"/>
                 <a:cs typeface="Meiryo" pitchFamily="34" charset="-120"/>
               </a:rPr>
-              <a:t>2026年8月10日 07:34（コロンビア時間、UTC-5）  (2026年8月10日 12:34（UTC） / 2026年8月10日 21:34（日本時間）)    |    Mww 7.4    |    深さ 107 km    |    改正メルカリ震度 MMI VII（非常に強い）／USGS ShakeMap</a:t>
+              <a:t>2026年8月10日 07:34 COT（12:34 UTC／21:34 JST）    |    Mww 7.4    |    深さ 107 km    |    改正メルカリ震度 MMI VII（非常に強い）／USGS ShakeMap</a:t>
             </a:r>
             <a:endParaRPr lang="en-US" sz="1150" dirty="0"/>
           </a:p>
@@ -26320,7 +26320,7 @@
         </p:nvSpPr>
         <p:spPr>
           <a:xfrm>
-            <a:off x="365760" y="1280160"/>
+            <a:off x="365760" y="1335024"/>
             <a:ext cx="11430000" cy="274320"/>
           </a:xfrm>
           <a:prstGeom prst="rect">
@@ -26359,8 +26359,8 @@
         </p:nvSpPr>
         <p:spPr>
           <a:xfrm>
-            <a:off x="365760" y="1627632"/>
-            <a:ext cx="11430000" cy="4480560"/>
+            <a:off x="365760" y="1664208"/>
+            <a:ext cx="11430000" cy="4443984"/>
           </a:xfrm>
           <a:prstGeom prst="rect">
             <a:avLst/>
@@ -26624,13 +26624,13 @@
             <a:r>
               <a:rPr lang="en-US" sz="1250" b="1" dirty="0">
                 <a:solidFill>
-                  <a:srgbClr val="888888"/>
+                  <a:srgbClr val="1E7A34"/>
                 </a:solidFill>
                 <a:latin typeface="Meiryo" pitchFamily="34" charset="0"/>
                 <a:ea typeface="Meiryo" pitchFamily="34" charset="-122"/>
                 <a:cs typeface="Meiryo" pitchFamily="34" charset="-120"/>
               </a:rPr>
-              <a:t>[確認中] </a:t>
+              <a:t>[公式] </a:t>
             </a:r>
             <a:pPr algn="l" indent="0" marL="0">
               <a:spcAft>
@@ -26647,7 +26647,7 @@
                 <a:ea typeface="Meiryo" pitchFamily="34" charset="-122"/>
                 <a:cs typeface="Meiryo" pitchFamily="34" charset="-120"/>
               </a:rPr>
-              <a:t>本稿執筆時点でGLIDE番号は確認できていない。付番され次第記載する。</a:t>
+              <a:t>本災害のGLIDE番号が付番された：EQ-2026-000146-COL。</a:t>
             </a:r>
             <a:endParaRPr lang="en-US" sz="1250" dirty="0"/>
           </a:p>
@@ -35954,7 +35954,7 @@
                           <a:ea typeface="Meiryo" pitchFamily="34" charset="-122"/>
                           <a:cs typeface="Meiryo" pitchFamily="34" charset="-120"/>
                         </a:rPr>
-                        <a:t>EQ-2026-XXXXXX-COL (TBC)</a:t>
+                        <a:t>EQ-2026-000146-COL</a:t>
                       </a:r>
                       <a:endParaRPr lang="en-US" sz="950" dirty="0">
                         <a:latin typeface="Meiryo" charset="0"/>

--- a/reports/colombia_eq_20260810/output/ADRC_EQ_COL_Choco_20260810_JA.pptx
+++ b/reports/colombia_eq_20260810/output/ADRC_EQ_COL_Choco_20260810_JA.pptx
@@ -27,9 +27,10 @@
     <p:sldId id="275" r:id="rId21"/>
     <p:sldId id="276" r:id="rId22"/>
     <p:sldId id="277" r:id="rId23"/>
+    <p:sldId id="278" r:id="rId24"/>
   </p:sldIdLst>
   <p:notesMasterIdLst>
-    <p:notesMasterId r:id="rId24"/>
+    <p:notesMasterId r:id="rId25"/>
   </p:notesMasterIdLst>
   <p:sldSz cx="12192000" cy="6858000"/>
   <p:notesSz cx="6858000" cy="12192000"/>
@@ -2347,6 +2348,94 @@
 </p:notes>
 </file>
 
+<file path=ppt/notesSlides/notesSlide23.xml><?xml version="1.0" encoding="utf-8"?>
+<p:notes xmlns:a="http://schemas.openxmlformats.org/drawingml/2006/main" xmlns:r="http://schemas.openxmlformats.org/officeDocument/2006/relationships" xmlns:p="http://schemas.openxmlformats.org/presentationml/2006/main">
+  <p:cSld>
+    <p:spTree>
+      <p:nvGrpSpPr>
+        <p:cNvPr id="1" name=""/>
+        <p:cNvGrpSpPr/>
+        <p:nvPr/>
+      </p:nvGrpSpPr>
+      <p:grpSpPr>
+        <a:xfrm>
+          <a:off x="0" y="0"/>
+          <a:ext cx="0" cy="0"/>
+          <a:chOff x="0" y="0"/>
+          <a:chExt cx="0" cy="0"/>
+        </a:xfrm>
+      </p:grpSpPr>
+      <p:sp>
+        <p:nvSpPr>
+          <p:cNvPr id="2" name="Slide Image Placeholder 1"/>
+          <p:cNvSpPr>
+            <a:spLocks noGrp="1" noRot="1" noChangeAspect="1"/>
+          </p:cNvSpPr>
+          <p:nvPr>
+            <p:ph type="sldImg"/>
+          </p:nvPr>
+        </p:nvSpPr>
+        <p:spPr/>
+      </p:sp>
+      <p:sp>
+        <p:nvSpPr>
+          <p:cNvPr id="3" name="Notes Placeholder 2"/>
+          <p:cNvSpPr>
+            <a:spLocks noGrp="1"/>
+          </p:cNvSpPr>
+          <p:nvPr>
+            <p:ph type="body" idx="1"/>
+          </p:nvPr>
+        </p:nvSpPr>
+        <p:spPr/>
+        <p:txBody>
+          <a:bodyPr/>
+          <a:lstStyle/>
+          <a:p>
+            <a:r>
+              <a:rPr lang="en-US" dirty="0"/>
+              <a:t/>
+            </a:r>
+            <a:endParaRPr lang="en-US" dirty="0"/>
+          </a:p>
+        </p:txBody>
+      </p:sp>
+      <p:sp>
+        <p:nvSpPr>
+          <p:cNvPr id="4" name="Slide Number Placeholder 3"/>
+          <p:cNvSpPr>
+            <a:spLocks noGrp="1"/>
+          </p:cNvSpPr>
+          <p:nvPr>
+            <p:ph type="sldNum" sz="quarter" idx="10"/>
+          </p:nvPr>
+        </p:nvSpPr>
+        <p:spPr/>
+        <p:txBody>
+          <a:bodyPr/>
+          <a:lstStyle/>
+          <a:p>
+            <a:fld id="{F7021451-1387-4CA6-816F-3879F97B5CBC}" type="slidenum">
+              <a:rPr lang="en-US"/>
+              <a:t>23</a:t>
+            </a:fld>
+            <a:endParaRPr lang="en-US"/>
+          </a:p>
+        </p:txBody>
+      </p:sp>
+    </p:spTree>
+    <p:extLst>
+      <p:ext uri="{BB962C8B-B14F-4D97-AF65-F5344CB8AC3E}">
+        <p14:creationId xmlns:p14="http://schemas.microsoft.com/office/powerpoint/2010/main" val="1024086991"/>
+      </p:ext>
+    </p:extLst>
+  </p:cSld>
+  <p:clrMapOvr>
+    <a:masterClrMapping/>
+  </p:clrMapOvr>
+</p:notes>
+</file>
+
 <file path=ppt/notesSlides/notesSlide3.xml><?xml version="1.0" encoding="utf-8"?>
 <p:notes xmlns:a="http://schemas.openxmlformats.org/drawingml/2006/main" xmlns:r="http://schemas.openxmlformats.org/officeDocument/2006/relationships" xmlns:p="http://schemas.openxmlformats.org/presentationml/2006/main">
   <p:cSld>
@@ -12442,13 +12531,13 @@
             <a:r>
               <a:rPr lang="en-US" sz="1200" b="1" dirty="0">
                 <a:solidFill>
-                  <a:srgbClr val="888888"/>
+                  <a:srgbClr val="B8860B"/>
                 </a:solidFill>
                 <a:latin typeface="Meiryo" pitchFamily="34" charset="0"/>
                 <a:ea typeface="Meiryo" pitchFamily="34" charset="-122"/>
                 <a:cs typeface="Meiryo" pitchFamily="34" charset="-120"/>
               </a:rPr>
-              <a:t>[確認中] </a:t>
+              <a:t>[報道] </a:t>
             </a:r>
             <a:pPr algn="l" indent="0" marL="0">
               <a:spcAft>
@@ -12465,7 +12554,7 @@
                 <a:ea typeface="Meiryo" pitchFamily="34" charset="-122"/>
                 <a:cs typeface="Meiryo" pitchFamily="34" charset="-120"/>
               </a:rPr>
-              <a:t>本地震について国際災害チャーター（Space and Major Disasters）が発動され、コペルニクス緊急管理サービスが動員されたと報じられている。被害把握用の衛星画像が提供される見込み。発動番号や成果物は確認中。</a:t>
+              <a:t>欧州委員会は本地震に対するコペルニクスの発動を発表した（フォンデアライエン委員長がコロンビアへの支援を表明）。国際災害チャーターも発動されたと報じられている。本稿執筆時点でコペルニクスのEMSR発動番号もチャーターの発動番号も特定できていない。なお EMSR915 はアルバニアの森林火災の発動であり、本地震のものではない。</a:t>
             </a:r>
             <a:endParaRPr lang="en-US" sz="1200" dirty="0"/>
           </a:p>
@@ -13408,7 +13497,7 @@
                           <a:ea typeface="Meiryo" pitchFamily="34" charset="-122"/>
                           <a:cs typeface="Meiryo" pitchFamily="34" charset="-120"/>
                         </a:rPr>
-                        <a:t>報道あり・確認中</a:t>
+                        <a:t>報道あり・番号未特定</a:t>
                       </a:r>
                       <a:endParaRPr lang="en-US" sz="900" dirty="0">
                         <a:latin typeface="Meiryo" charset="0"/>
@@ -13614,7 +13703,7 @@
                           <a:ea typeface="Meiryo" pitchFamily="34" charset="-122"/>
                           <a:cs typeface="Meiryo" pitchFamily="34" charset="-120"/>
                         </a:rPr>
-                        <a:t>被災各県を対象にラピッドマッピングを動員</a:t>
+                        <a:t>欧州委員会がラピッドマッピングの発動を発表。EMSR発動番号は未特定</a:t>
                       </a:r>
                       <a:endParaRPr lang="en-US" sz="950" dirty="0">
                         <a:latin typeface="Meiryo" charset="0"/>
@@ -13682,7 +13771,7 @@
                           <a:ea typeface="Meiryo" pitchFamily="34" charset="-122"/>
                           <a:cs typeface="Meiryo" pitchFamily="34" charset="-120"/>
                         </a:rPr>
-                        <a:t>報道あり・確認中</a:t>
+                        <a:t>発表済み・番号未特定</a:t>
                       </a:r>
                       <a:endParaRPr lang="en-US" sz="900" dirty="0">
                         <a:latin typeface="Meiryo" charset="0"/>
@@ -13744,13 +13833,13 @@
                       <a:r>
                         <a:rPr lang="en-US" sz="850" b="1" dirty="0">
                           <a:solidFill>
-                            <a:srgbClr val="888888"/>
+                            <a:srgbClr val="B8860B"/>
                           </a:solidFill>
                           <a:latin typeface="Meiryo" pitchFamily="34" charset="0"/>
                           <a:ea typeface="Meiryo" pitchFamily="34" charset="-122"/>
                           <a:cs typeface="Meiryo" pitchFamily="34" charset="-120"/>
                         </a:rPr>
-                        <a:t>確認中</a:t>
+                        <a:t>報道</a:t>
                       </a:r>
                       <a:endParaRPr lang="en-US" sz="850" dirty="0">
                         <a:latin typeface="Meiryo" charset="0"/>
@@ -21150,7 +21239,7 @@
                 <a:ea typeface="Meiryo" pitchFamily="34" charset="-122"/>
                 <a:cs typeface="Meiryo" pitchFamily="34" charset="-120"/>
               </a:rPr>
-              <a:t>有用リンク・出典（1/2）</a:t>
+              <a:t>有用リンク・出典（1/3）</a:t>
             </a:r>
             <a:endParaRPr lang="en-US" sz="1900" dirty="0"/>
           </a:p>
@@ -24835,7 +24924,7 @@
                 <a:ea typeface="Meiryo" pitchFamily="34" charset="-122"/>
                 <a:cs typeface="Meiryo" pitchFamily="34" charset="-120"/>
               </a:rPr>
-              <a:t>有用リンク・出典（2/2）</a:t>
+              <a:t>有用リンク・出典（2/3）</a:t>
             </a:r>
             <a:endParaRPr lang="en-US" sz="1900" dirty="0"/>
           </a:p>
@@ -28411,6 +28500,656 @@
 <file path=ppt/slides/slide22.xml><?xml version="1.0" encoding="utf-8"?>
 <p:sld xmlns:a="http://schemas.openxmlformats.org/drawingml/2006/main" xmlns:r="http://schemas.openxmlformats.org/officeDocument/2006/relationships" xmlns:p="http://schemas.openxmlformats.org/presentationml/2006/main">
   <p:cSld name="Slide 22">
+    <p:bg>
+      <p:bgPr>
+        <a:solidFill>
+          <a:srgbClr val="FFFFFF"/>
+        </a:solidFill>
+      </p:bgPr>
+    </p:bg>
+    <p:spTree>
+      <p:nvGrpSpPr>
+        <p:cNvPr id="1" name=""/>
+        <p:cNvGrpSpPr/>
+        <p:nvPr/>
+      </p:nvGrpSpPr>
+      <p:grpSpPr>
+        <a:xfrm>
+          <a:off x="0" y="0"/>
+          <a:ext cx="0" cy="0"/>
+          <a:chOff x="0" y="0"/>
+          <a:chExt cx="0" cy="0"/>
+        </a:xfrm>
+      </p:grpSpPr>
+      <p:sp>
+        <p:nvSpPr>
+          <p:cNvPr id="2" name="Text 0"/>
+          <p:cNvSpPr/>
+          <p:nvPr/>
+        </p:nvSpPr>
+        <p:spPr>
+          <a:xfrm>
+            <a:off x="365760" y="292608"/>
+            <a:ext cx="10332720" cy="566928"/>
+          </a:xfrm>
+          <a:prstGeom prst="rect">
+            <a:avLst/>
+          </a:prstGeom>
+          <a:noFill/>
+          <a:ln/>
+        </p:spPr>
+        <p:txBody>
+          <a:bodyPr wrap="none" lIns="0" tIns="0" rIns="0" bIns="0" rtlCol="0" anchor="ctr">
+            <a:normAutofit/>
+          </a:bodyPr>
+          <a:lstStyle/>
+          <a:p>
+            <a:pPr algn="l" indent="0" marL="0">
+              <a:buNone/>
+            </a:pPr>
+            <a:r>
+              <a:rPr lang="en-US" sz="1900" b="1" dirty="0">
+                <a:solidFill>
+                  <a:srgbClr val="1F3864"/>
+                </a:solidFill>
+                <a:latin typeface="Meiryo" pitchFamily="34" charset="0"/>
+                <a:ea typeface="Meiryo" pitchFamily="34" charset="-122"/>
+                <a:cs typeface="Meiryo" pitchFamily="34" charset="-120"/>
+              </a:rPr>
+              <a:t>有用リンク・出典（3/3）</a:t>
+            </a:r>
+            <a:endParaRPr lang="en-US" sz="1900" dirty="0"/>
+          </a:p>
+        </p:txBody>
+      </p:sp>
+      <p:pic>
+        <p:nvPicPr>
+          <p:cNvPr id="3" name="Image 0" descr="/home/user/whatsmap/reports/colombia_eq_20260810/images/adrc_logo.png">    </p:cNvPr>
+          <p:cNvPicPr>
+            <a:picLocks noChangeAspect="1"/>
+          </p:cNvPicPr>
+          <p:nvPr/>
+        </p:nvPicPr>
+        <p:blipFill>
+          <a:blip r:embed="rId1"/>
+          <a:stretch>
+            <a:fillRect/>
+          </a:stretch>
+        </p:blipFill>
+        <p:spPr>
+          <a:xfrm>
+            <a:off x="10945368" y="73152"/>
+            <a:ext cx="877824" cy="877824"/>
+          </a:xfrm>
+          <a:prstGeom prst="rect">
+            <a:avLst/>
+          </a:prstGeom>
+        </p:spPr>
+      </p:pic>
+      <p:graphicFrame>
+        <p:nvGraphicFramePr>
+          <p:cNvPr id="23" name="Table 0"/>
+          <p:cNvGraphicFramePr>
+            <a:graphicFrameLocks noGrp="1"/>
+          </p:cNvGraphicFramePr>
+          <p:nvPr>
+            <p:extLst>
+              <p:ext uri="{D42A27DB-BD31-4B8C-83A1-F6EECF244321}">
+                <p14:modId xmlns:p14="http://schemas.microsoft.com/office/powerpoint/2010/main" val="1579011935"/>
+              </p:ext>
+            </p:extLst>
+          </p:nvPr>
+        </p:nvGraphicFramePr>
+        <p:xfrm>
+          <a:off x="365760" y="1024128"/>
+          <a:ext cx="11430000" cy="914400"/>
+        </p:xfrm>
+        <a:graphic>
+          <a:graphicData uri="http://schemas.openxmlformats.org/drawingml/2006/table">
+            <a:tbl>
+              <a:tblPr/>
+              <a:tblGrid>
+                <a:gridCol w="4206240"/>
+                <a:gridCol w="822960"/>
+                <a:gridCol w="6400800"/>
+              </a:tblGrid>
+              <a:tr h="292608">
+                <a:tc>
+                  <a:txBody>
+                    <a:bodyPr/>
+                    <a:lstStyle/>
+                    <a:p>
+                      <a:pPr algn="l" indent="0" marL="0">
+                        <a:buNone/>
+                      </a:pPr>
+                      <a:r>
+                        <a:rPr lang="en-US" sz="1150" b="1" dirty="0">
+                          <a:solidFill>
+                            <a:srgbClr val="FFFFFF"/>
+                          </a:solidFill>
+                          <a:latin typeface="Meiryo" pitchFamily="34" charset="0"/>
+                          <a:ea typeface="Meiryo" pitchFamily="34" charset="-122"/>
+                          <a:cs typeface="Meiryo" pitchFamily="34" charset="-120"/>
+                        </a:rPr>
+                        <a:t>情報源</a:t>
+                      </a:r>
+                      <a:endParaRPr lang="en-US" sz="1150" dirty="0">
+                        <a:latin typeface="Meiryo" charset="0"/>
+                        <a:ea typeface="Meiryo" charset="0"/>
+                        <a:cs typeface="Meiryo" charset="0"/>
+                      </a:endParaRPr>
+                    </a:p>
+                  </a:txBody>
+                  <a:tcPr marL="50800" marR="50800" marT="50800" marB="50800" anchor="ctr">
+                    <a:lnL w="6350" cap="flat" cmpd="sng" algn="ctr">
+                      <a:solidFill>
+                        <a:srgbClr val="D9D9D9"/>
+                      </a:solidFill>
+                      <a:prstDash val="solid"/>
+                      <a:round/>
+                      <a:headEnd type="none" w="med" len="med"/>
+                      <a:tailEnd type="none" w="med" len="med"/>
+                    </a:lnL>
+                    <a:lnR w="6350" cap="flat" cmpd="sng" algn="ctr">
+                      <a:solidFill>
+                        <a:srgbClr val="D9D9D9"/>
+                      </a:solidFill>
+                      <a:prstDash val="solid"/>
+                      <a:round/>
+                      <a:headEnd type="none" w="med" len="med"/>
+                      <a:tailEnd type="none" w="med" len="med"/>
+                    </a:lnR>
+                    <a:lnT w="6350" cap="flat" cmpd="sng" algn="ctr">
+                      <a:solidFill>
+                        <a:srgbClr val="D9D9D9"/>
+                      </a:solidFill>
+                      <a:prstDash val="solid"/>
+                      <a:round/>
+                      <a:headEnd type="none" w="med" len="med"/>
+                      <a:tailEnd type="none" w="med" len="med"/>
+                    </a:lnT>
+                    <a:lnB w="6350" cap="flat" cmpd="sng" algn="ctr">
+                      <a:solidFill>
+                        <a:srgbClr val="D9D9D9"/>
+                      </a:solidFill>
+                      <a:prstDash val="solid"/>
+                      <a:round/>
+                      <a:headEnd type="none" w="med" len="med"/>
+                      <a:tailEnd type="none" w="med" len="med"/>
+                    </a:lnB>
+                    <a:solidFill>
+                      <a:srgbClr val="1F3864"/>
+                    </a:solidFill>
+                  </a:tcPr>
+                </a:tc>
+                <a:tc>
+                  <a:txBody>
+                    <a:bodyPr/>
+                    <a:lstStyle/>
+                    <a:p>
+                      <a:pPr algn="l" indent="0" marL="0">
+                        <a:buNone/>
+                      </a:pPr>
+                      <a:r>
+                        <a:rPr lang="en-US" sz="1150" b="1" dirty="0">
+                          <a:solidFill>
+                            <a:srgbClr val="FFFFFF"/>
+                          </a:solidFill>
+                          <a:latin typeface="Meiryo" pitchFamily="34" charset="0"/>
+                          <a:ea typeface="Meiryo" pitchFamily="34" charset="-122"/>
+                          <a:cs typeface="Meiryo" pitchFamily="34" charset="-120"/>
+                        </a:rPr>
+                        <a:t>区分</a:t>
+                      </a:r>
+                      <a:endParaRPr lang="en-US" sz="1150" dirty="0">
+                        <a:latin typeface="Meiryo" charset="0"/>
+                        <a:ea typeface="Meiryo" charset="0"/>
+                        <a:cs typeface="Meiryo" charset="0"/>
+                      </a:endParaRPr>
+                    </a:p>
+                  </a:txBody>
+                  <a:tcPr marL="50800" marR="50800" marT="50800" marB="50800" anchor="ctr">
+                    <a:lnL w="6350" cap="flat" cmpd="sng" algn="ctr">
+                      <a:solidFill>
+                        <a:srgbClr val="D9D9D9"/>
+                      </a:solidFill>
+                      <a:prstDash val="solid"/>
+                      <a:round/>
+                      <a:headEnd type="none" w="med" len="med"/>
+                      <a:tailEnd type="none" w="med" len="med"/>
+                    </a:lnL>
+                    <a:lnR w="6350" cap="flat" cmpd="sng" algn="ctr">
+                      <a:solidFill>
+                        <a:srgbClr val="D9D9D9"/>
+                      </a:solidFill>
+                      <a:prstDash val="solid"/>
+                      <a:round/>
+                      <a:headEnd type="none" w="med" len="med"/>
+                      <a:tailEnd type="none" w="med" len="med"/>
+                    </a:lnR>
+                    <a:lnT w="6350" cap="flat" cmpd="sng" algn="ctr">
+                      <a:solidFill>
+                        <a:srgbClr val="D9D9D9"/>
+                      </a:solidFill>
+                      <a:prstDash val="solid"/>
+                      <a:round/>
+                      <a:headEnd type="none" w="med" len="med"/>
+                      <a:tailEnd type="none" w="med" len="med"/>
+                    </a:lnT>
+                    <a:lnB w="6350" cap="flat" cmpd="sng" algn="ctr">
+                      <a:solidFill>
+                        <a:srgbClr val="D9D9D9"/>
+                      </a:solidFill>
+                      <a:prstDash val="solid"/>
+                      <a:round/>
+                      <a:headEnd type="none" w="med" len="med"/>
+                      <a:tailEnd type="none" w="med" len="med"/>
+                    </a:lnB>
+                    <a:solidFill>
+                      <a:srgbClr val="1F3864"/>
+                    </a:solidFill>
+                  </a:tcPr>
+                </a:tc>
+                <a:tc>
+                  <a:txBody>
+                    <a:bodyPr/>
+                    <a:lstStyle/>
+                    <a:p>
+                      <a:pPr algn="l" indent="0" marL="0">
+                        <a:buNone/>
+                      </a:pPr>
+                      <a:r>
+                        <a:rPr lang="en-US" sz="1150" b="1" dirty="0">
+                          <a:solidFill>
+                            <a:srgbClr val="FFFFFF"/>
+                          </a:solidFill>
+                          <a:latin typeface="Meiryo" pitchFamily="34" charset="0"/>
+                          <a:ea typeface="Meiryo" pitchFamily="34" charset="-122"/>
+                          <a:cs typeface="Meiryo" pitchFamily="34" charset="-120"/>
+                        </a:rPr>
+                        <a:t>URL</a:t>
+                      </a:r>
+                      <a:endParaRPr lang="en-US" sz="1150" dirty="0">
+                        <a:latin typeface="Meiryo" charset="0"/>
+                        <a:ea typeface="Meiryo" charset="0"/>
+                        <a:cs typeface="Meiryo" charset="0"/>
+                      </a:endParaRPr>
+                    </a:p>
+                  </a:txBody>
+                  <a:tcPr marL="50800" marR="50800" marT="50800" marB="50800" anchor="ctr">
+                    <a:lnL w="6350" cap="flat" cmpd="sng" algn="ctr">
+                      <a:solidFill>
+                        <a:srgbClr val="D9D9D9"/>
+                      </a:solidFill>
+                      <a:prstDash val="solid"/>
+                      <a:round/>
+                      <a:headEnd type="none" w="med" len="med"/>
+                      <a:tailEnd type="none" w="med" len="med"/>
+                    </a:lnL>
+                    <a:lnR w="6350" cap="flat" cmpd="sng" algn="ctr">
+                      <a:solidFill>
+                        <a:srgbClr val="D9D9D9"/>
+                      </a:solidFill>
+                      <a:prstDash val="solid"/>
+                      <a:round/>
+                      <a:headEnd type="none" w="med" len="med"/>
+                      <a:tailEnd type="none" w="med" len="med"/>
+                    </a:lnR>
+                    <a:lnT w="6350" cap="flat" cmpd="sng" algn="ctr">
+                      <a:solidFill>
+                        <a:srgbClr val="D9D9D9"/>
+                      </a:solidFill>
+                      <a:prstDash val="solid"/>
+                      <a:round/>
+                      <a:headEnd type="none" w="med" len="med"/>
+                      <a:tailEnd type="none" w="med" len="med"/>
+                    </a:lnT>
+                    <a:lnB w="6350" cap="flat" cmpd="sng" algn="ctr">
+                      <a:solidFill>
+                        <a:srgbClr val="D9D9D9"/>
+                      </a:solidFill>
+                      <a:prstDash val="solid"/>
+                      <a:round/>
+                      <a:headEnd type="none" w="med" len="med"/>
+                      <a:tailEnd type="none" w="med" len="med"/>
+                    </a:lnB>
+                    <a:solidFill>
+                      <a:srgbClr val="1F3864"/>
+                    </a:solidFill>
+                  </a:tcPr>
+                </a:tc>
+              </a:tr>
+              <a:tr h="292608">
+                <a:tc>
+                  <a:txBody>
+                    <a:bodyPr/>
+                    <a:lstStyle/>
+                    <a:p>
+                      <a:pPr algn="l" indent="0" marL="0">
+                        <a:buNone/>
+                      </a:pPr>
+                      <a:r>
+                        <a:rPr lang="en-US" sz="950" dirty="0">
+                          <a:solidFill>
+                            <a:srgbClr val="222222"/>
+                          </a:solidFill>
+                          <a:latin typeface="Meiryo" pitchFamily="34" charset="0"/>
+                          <a:ea typeface="Meiryo" pitchFamily="34" charset="-122"/>
+                          <a:cs typeface="Meiryo" pitchFamily="34" charset="-120"/>
+                        </a:rPr>
+                        <a:t>欧州委員会 コロンビア支援・コペルニクス発動</a:t>
+                      </a:r>
+                      <a:endParaRPr lang="en-US" sz="950" dirty="0">
+                        <a:latin typeface="Meiryo" charset="0"/>
+                        <a:ea typeface="Meiryo" charset="0"/>
+                        <a:cs typeface="Meiryo" charset="0"/>
+                      </a:endParaRPr>
+                    </a:p>
+                  </a:txBody>
+                  <a:tcPr marL="50800" marR="50800" marT="50800" marB="50800" anchor="ctr">
+                    <a:lnL w="6350" cap="flat" cmpd="sng" algn="ctr">
+                      <a:solidFill>
+                        <a:srgbClr val="D9D9D9"/>
+                      </a:solidFill>
+                      <a:prstDash val="solid"/>
+                      <a:round/>
+                      <a:headEnd type="none" w="med" len="med"/>
+                      <a:tailEnd type="none" w="med" len="med"/>
+                    </a:lnL>
+                    <a:lnR w="6350" cap="flat" cmpd="sng" algn="ctr">
+                      <a:solidFill>
+                        <a:srgbClr val="D9D9D9"/>
+                      </a:solidFill>
+                      <a:prstDash val="solid"/>
+                      <a:round/>
+                      <a:headEnd type="none" w="med" len="med"/>
+                      <a:tailEnd type="none" w="med" len="med"/>
+                    </a:lnR>
+                    <a:lnT w="6350" cap="flat" cmpd="sng" algn="ctr">
+                      <a:solidFill>
+                        <a:srgbClr val="D9D9D9"/>
+                      </a:solidFill>
+                      <a:prstDash val="solid"/>
+                      <a:round/>
+                      <a:headEnd type="none" w="med" len="med"/>
+                      <a:tailEnd type="none" w="med" len="med"/>
+                    </a:lnT>
+                    <a:lnB w="6350" cap="flat" cmpd="sng" algn="ctr">
+                      <a:solidFill>
+                        <a:srgbClr val="D9D9D9"/>
+                      </a:solidFill>
+                      <a:prstDash val="solid"/>
+                      <a:round/>
+                      <a:headEnd type="none" w="med" len="med"/>
+                      <a:tailEnd type="none" w="med" len="med"/>
+                    </a:lnB>
+                    <a:solidFill>
+                      <a:srgbClr val="EAF2F8"/>
+                    </a:solidFill>
+                  </a:tcPr>
+                </a:tc>
+                <a:tc>
+                  <a:txBody>
+                    <a:bodyPr/>
+                    <a:lstStyle/>
+                    <a:p>
+                      <a:pPr algn="ctr" indent="0" marL="0">
+                        <a:buNone/>
+                      </a:pPr>
+                      <a:r>
+                        <a:rPr lang="en-US" sz="850" b="1" dirty="0">
+                          <a:solidFill>
+                            <a:srgbClr val="B8860B"/>
+                          </a:solidFill>
+                          <a:latin typeface="Meiryo" pitchFamily="34" charset="0"/>
+                          <a:ea typeface="Meiryo" pitchFamily="34" charset="-122"/>
+                          <a:cs typeface="Meiryo" pitchFamily="34" charset="-120"/>
+                        </a:rPr>
+                        <a:t>報道</a:t>
+                      </a:r>
+                      <a:endParaRPr lang="en-US" sz="850" dirty="0">
+                        <a:latin typeface="Meiryo" charset="0"/>
+                        <a:ea typeface="Meiryo" charset="0"/>
+                        <a:cs typeface="Meiryo" charset="0"/>
+                      </a:endParaRPr>
+                    </a:p>
+                  </a:txBody>
+                  <a:tcPr marL="50800" marR="50800" marT="50800" marB="50800" anchor="ctr">
+                    <a:lnL w="6350" cap="flat" cmpd="sng" algn="ctr">
+                      <a:solidFill>
+                        <a:srgbClr val="D9D9D9"/>
+                      </a:solidFill>
+                      <a:prstDash val="solid"/>
+                      <a:round/>
+                      <a:headEnd type="none" w="med" len="med"/>
+                      <a:tailEnd type="none" w="med" len="med"/>
+                    </a:lnL>
+                    <a:lnR w="6350" cap="flat" cmpd="sng" algn="ctr">
+                      <a:solidFill>
+                        <a:srgbClr val="D9D9D9"/>
+                      </a:solidFill>
+                      <a:prstDash val="solid"/>
+                      <a:round/>
+                      <a:headEnd type="none" w="med" len="med"/>
+                      <a:tailEnd type="none" w="med" len="med"/>
+                    </a:lnR>
+                    <a:lnT w="6350" cap="flat" cmpd="sng" algn="ctr">
+                      <a:solidFill>
+                        <a:srgbClr val="D9D9D9"/>
+                      </a:solidFill>
+                      <a:prstDash val="solid"/>
+                      <a:round/>
+                      <a:headEnd type="none" w="med" len="med"/>
+                      <a:tailEnd type="none" w="med" len="med"/>
+                    </a:lnT>
+                    <a:lnB w="6350" cap="flat" cmpd="sng" algn="ctr">
+                      <a:solidFill>
+                        <a:srgbClr val="D9D9D9"/>
+                      </a:solidFill>
+                      <a:prstDash val="solid"/>
+                      <a:round/>
+                      <a:headEnd type="none" w="med" len="med"/>
+                      <a:tailEnd type="none" w="med" len="med"/>
+                    </a:lnB>
+                    <a:solidFill>
+                      <a:srgbClr val="EAF2F8"/>
+                    </a:solidFill>
+                  </a:tcPr>
+                </a:tc>
+                <a:tc>
+                  <a:txBody>
+                    <a:bodyPr/>
+                    <a:lstStyle/>
+                    <a:p>
+                      <a:pPr algn="l" indent="0" marL="0">
+                        <a:buNone/>
+                      </a:pPr>
+                      <a:r>
+                        <a:rPr lang="en-US" sz="800" u="sng" dirty="0">
+                          <a:solidFill>
+                            <a:srgbClr val="0563C1"/>
+                          </a:solidFill>
+                          <a:latin typeface="Meiryo" pitchFamily="34" charset="0"/>
+                          <a:ea typeface="Meiryo" pitchFamily="34" charset="-122"/>
+                          <a:cs typeface="Meiryo" pitchFamily="34" charset="-120"/>
+                          <a:hlinkClick r:id="rId2" invalidUrl="" action="" tgtFrame="" tooltip="" history="1" highlightClick="0" endSnd="0">
+                            <a:extLst>
+                              <a:ext uri="{A12FA001-AC4F-418D-AE19-62706E023703}">
+                                <ahyp:hlinkClr xmlns:ahyp="http://schemas.microsoft.com/office/drawing/2018/hyperlinkcolor" val="tx"/>
+                              </a:ext>
+                            </a:extLst>
+                          </a:hlinkClick>
+                        </a:rPr>
+                        <a:t>https://www.democrata.es/en/international/von-der-leyen-expresses-the-eu-s-support-for-colombia-and-activates-copernicus-after-the-earthquake/</a:t>
+                      </a:r>
+                      <a:endParaRPr lang="en-US" sz="800" dirty="0">
+                        <a:latin typeface="Meiryo" charset="0"/>
+                        <a:ea typeface="Meiryo" charset="0"/>
+                        <a:cs typeface="Meiryo" charset="0"/>
+                      </a:endParaRPr>
+                    </a:p>
+                  </a:txBody>
+                  <a:tcPr marL="50800" marR="50800" marT="50800" marB="50800" anchor="ctr">
+                    <a:lnL w="6350" cap="flat" cmpd="sng" algn="ctr">
+                      <a:solidFill>
+                        <a:srgbClr val="D9D9D9"/>
+                      </a:solidFill>
+                      <a:prstDash val="solid"/>
+                      <a:round/>
+                      <a:headEnd type="none" w="med" len="med"/>
+                      <a:tailEnd type="none" w="med" len="med"/>
+                    </a:lnL>
+                    <a:lnR w="6350" cap="flat" cmpd="sng" algn="ctr">
+                      <a:solidFill>
+                        <a:srgbClr val="D9D9D9"/>
+                      </a:solidFill>
+                      <a:prstDash val="solid"/>
+                      <a:round/>
+                      <a:headEnd type="none" w="med" len="med"/>
+                      <a:tailEnd type="none" w="med" len="med"/>
+                    </a:lnR>
+                    <a:lnT w="6350" cap="flat" cmpd="sng" algn="ctr">
+                      <a:solidFill>
+                        <a:srgbClr val="D9D9D9"/>
+                      </a:solidFill>
+                      <a:prstDash val="solid"/>
+                      <a:round/>
+                      <a:headEnd type="none" w="med" len="med"/>
+                      <a:tailEnd type="none" w="med" len="med"/>
+                    </a:lnT>
+                    <a:lnB w="6350" cap="flat" cmpd="sng" algn="ctr">
+                      <a:solidFill>
+                        <a:srgbClr val="D9D9D9"/>
+                      </a:solidFill>
+                      <a:prstDash val="solid"/>
+                      <a:round/>
+                      <a:headEnd type="none" w="med" len="med"/>
+                      <a:tailEnd type="none" w="med" len="med"/>
+                    </a:lnB>
+                    <a:solidFill>
+                      <a:srgbClr val="EAF2F8"/>
+                    </a:solidFill>
+                  </a:tcPr>
+                </a:tc>
+              </a:tr>
+            </a:tbl>
+          </a:graphicData>
+        </a:graphic>
+      </p:graphicFrame>
+      <p:sp>
+        <p:nvSpPr>
+          <p:cNvPr id="5" name="Shape 1"/>
+          <p:cNvSpPr/>
+          <p:nvPr/>
+        </p:nvSpPr>
+        <p:spPr>
+          <a:xfrm>
+            <a:off x="10268712" y="6510528"/>
+            <a:ext cx="1554480" cy="274320"/>
+          </a:xfrm>
+          <a:prstGeom prst="rect">
+            <a:avLst/>
+          </a:prstGeom>
+          <a:solidFill>
+            <a:srgbClr val="E8A317"/>
+          </a:solidFill>
+          <a:ln w="12700">
+            <a:solidFill>
+              <a:srgbClr val="E8A317"/>
+            </a:solidFill>
+            <a:prstDash val="solid"/>
+          </a:ln>
+        </p:spPr>
+      </p:sp>
+      <p:sp>
+        <p:nvSpPr>
+          <p:cNvPr id="6" name="Text 2"/>
+          <p:cNvSpPr/>
+          <p:nvPr/>
+        </p:nvSpPr>
+        <p:spPr>
+          <a:xfrm>
+            <a:off x="10268712" y="6510528"/>
+            <a:ext cx="1554480" cy="274320"/>
+          </a:xfrm>
+          <a:prstGeom prst="rect">
+            <a:avLst/>
+          </a:prstGeom>
+          <a:noFill/>
+          <a:ln/>
+        </p:spPr>
+        <p:txBody>
+          <a:bodyPr wrap="square" lIns="0" tIns="0" rIns="0" bIns="0" rtlCol="0" anchor="ctr"/>
+          <a:lstStyle/>
+          <a:p>
+            <a:pPr algn="ctr" indent="0" marL="0">
+              <a:buNone/>
+            </a:pPr>
+            <a:r>
+              <a:rPr lang="en-US" sz="950" b="1" dirty="0">
+                <a:solidFill>
+                  <a:srgbClr val="000000"/>
+                </a:solidFill>
+                <a:latin typeface="Meiryo" pitchFamily="34" charset="0"/>
+                <a:ea typeface="Meiryo" pitchFamily="34" charset="-122"/>
+                <a:cs typeface="Meiryo" pitchFamily="34" charset="-120"/>
+              </a:rPr>
+              <a:t>ADRC  11/08/2026</a:t>
+            </a:r>
+            <a:endParaRPr lang="en-US" sz="950" dirty="0"/>
+          </a:p>
+        </p:txBody>
+      </p:sp>
+      <p:sp>
+        <p:nvSpPr>
+          <p:cNvPr id="7" name="Text 3"/>
+          <p:cNvSpPr/>
+          <p:nvPr/>
+        </p:nvSpPr>
+        <p:spPr>
+          <a:xfrm>
+            <a:off x="365760" y="6547104"/>
+            <a:ext cx="548640" cy="219456"/>
+          </a:xfrm>
+          <a:prstGeom prst="rect">
+            <a:avLst/>
+          </a:prstGeom>
+          <a:noFill/>
+          <a:ln/>
+        </p:spPr>
+        <p:txBody>
+          <a:bodyPr wrap="square" lIns="0" tIns="0" rIns="0" bIns="0" rtlCol="0" anchor="ctr"/>
+          <a:lstStyle/>
+          <a:p>
+            <a:pPr algn="l" indent="0" marL="0">
+              <a:buNone/>
+            </a:pPr>
+            <a:r>
+              <a:rPr lang="en-US" sz="900" dirty="0">
+                <a:solidFill>
+                  <a:srgbClr val="6A6A6A"/>
+                </a:solidFill>
+                <a:latin typeface="Meiryo" pitchFamily="34" charset="0"/>
+                <a:ea typeface="Meiryo" pitchFamily="34" charset="-122"/>
+                <a:cs typeface="Meiryo" pitchFamily="34" charset="-120"/>
+              </a:rPr>
+              <a:t>22</a:t>
+            </a:r>
+            <a:endParaRPr lang="en-US" sz="900" dirty="0"/>
+          </a:p>
+        </p:txBody>
+      </p:sp>
+    </p:spTree>
+  </p:cSld>
+  <p:clrMapOvr>
+    <a:masterClrMapping/>
+  </p:clrMapOvr>
+</p:sld>
+</file>
+
+<file path=ppt/slides/slide23.xml><?xml version="1.0" encoding="utf-8"?>
+<p:sld xmlns:a="http://schemas.openxmlformats.org/drawingml/2006/main" xmlns:r="http://schemas.openxmlformats.org/officeDocument/2006/relationships" xmlns:p="http://schemas.openxmlformats.org/presentationml/2006/main">
+  <p:cSld name="Slide 23">
     <p:bg>
       <p:bgPr>
         <a:solidFill>
@@ -28718,7 +29457,7 @@
                 <a:ea typeface="Meiryo" pitchFamily="34" charset="-122"/>
                 <a:cs typeface="Meiryo" pitchFamily="34" charset="-120"/>
               </a:rPr>
-              <a:t>22</a:t>
+              <a:t>23</a:t>
             </a:r>
             <a:endParaRPr lang="en-US" sz="900" dirty="0"/>
           </a:p>

--- a/reports/colombia_eq_20260810/output/ADRC_EQ_COL_Choco_20260810_JA.pptx
+++ b/reports/colombia_eq_20260810/output/ADRC_EQ_COL_Choco_20260810_JA.pptx
@@ -12531,13 +12531,13 @@
             <a:r>
               <a:rPr lang="en-US" sz="1200" b="1" dirty="0">
                 <a:solidFill>
-                  <a:srgbClr val="B8860B"/>
+                  <a:srgbClr val="1E7A34"/>
                 </a:solidFill>
                 <a:latin typeface="Meiryo" pitchFamily="34" charset="0"/>
                 <a:ea typeface="Meiryo" pitchFamily="34" charset="-122"/>
                 <a:cs typeface="Meiryo" pitchFamily="34" charset="-120"/>
               </a:rPr>
-              <a:t>[報道] </a:t>
+              <a:t>[公式] </a:t>
             </a:r>
             <a:pPr algn="l" indent="0" marL="0">
               <a:spcAft>
@@ -12554,7 +12554,42 @@
                 <a:ea typeface="Meiryo" pitchFamily="34" charset="-122"/>
                 <a:cs typeface="Meiryo" pitchFamily="34" charset="-120"/>
               </a:rPr>
-              <a:t>欧州委員会は本地震に対するコペルニクスの発動を発表した（フォンデアライエン委員長がコロンビアへの支援を表明）。国際災害チャーターも発動されたと報じられている。本稿執筆時点でコペルニクスのEMSR発動番号もチャーターの発動番号も特定できていない。なお EMSR915 はアルバニアの森林火災の発動であり、本地震のものではない。</a:t>
+              <a:t>コペルニクス緊急管理サービスのラピッドマッピングが、8月10日17:13 UTC（現地12:13）に EMSR916「Earthquake in Colombia」として発動。要請は欧州委員会サービス／DG ECHO、目的は地震被害評価の緊急マッピング。本稿執筆時点で対応中、関心領域3・成果物3。発動理由には、著しい被害と建物倒壊のあった都市としてキブド、ペレイラ、マニサレス、カリが挙げられている。</a:t>
+            </a:r>
+            <a:endParaRPr lang="en-US" sz="1200" dirty="0"/>
+          </a:p>
+          <a:p>
+            <a:pPr algn="l" marL="342900" indent="-342900">
+              <a:buSzPct val="100000"/>
+              <a:buChar char="•"/>
+            </a:pPr>
+            <a:r>
+              <a:rPr lang="en-US" sz="1200" b="1" dirty="0">
+                <a:solidFill>
+                  <a:srgbClr val="888888"/>
+                </a:solidFill>
+                <a:latin typeface="Meiryo" pitchFamily="34" charset="0"/>
+                <a:ea typeface="Meiryo" pitchFamily="34" charset="-122"/>
+                <a:cs typeface="Meiryo" pitchFamily="34" charset="-120"/>
+              </a:rPr>
+              <a:t>[確認中] </a:t>
+            </a:r>
+            <a:pPr algn="l" indent="0" marL="0">
+              <a:spcAft>
+                <a:spcPts val="500"/>
+              </a:spcAft>
+              <a:buNone/>
+            </a:pPr>
+            <a:r>
+              <a:rPr lang="en-US" sz="1300" dirty="0">
+                <a:solidFill>
+                  <a:srgbClr val="222222"/>
+                </a:solidFill>
+                <a:latin typeface="Meiryo" pitchFamily="34" charset="0"/>
+                <a:ea typeface="Meiryo" pitchFamily="34" charset="-122"/>
+                <a:cs typeface="Meiryo" pitchFamily="34" charset="-120"/>
+              </a:rPr>
+              <a:t>国際災害チャーター（Space and Major Disasters）も本地震について発動されたと報じられている。発動番号は本稿執筆時点で確認できていない。</a:t>
             </a:r>
             <a:endParaRPr lang="en-US" sz="1200" dirty="0"/>
           </a:p>
@@ -12800,7 +12835,7 @@
                   </a:extLst>
                 </a:hlinkClick>
               </a:rPr>
-              <a:t>コペルニクスEMS ラピッドマッピング</a:t>
+              <a:t>コペルニクスEMS EMSR916「Earthquake in Colombia」（発動）</a:t>
             </a:r>
             <a:pPr algn="l" indent="0" marL="0">
               <a:buNone/>
@@ -13703,7 +13738,7 @@
                           <a:ea typeface="Meiryo" pitchFamily="34" charset="-122"/>
                           <a:cs typeface="Meiryo" pitchFamily="34" charset="-120"/>
                         </a:rPr>
-                        <a:t>欧州委員会がラピッドマッピングの発動を発表。EMSR発動番号は未特定</a:t>
+                        <a:t>EMSR916「Earthquake in Colombia」— 被害評価のためのラピッドマッピング。要請は欧州委員会サービス／DG ECHO。関心領域3・成果物3</a:t>
                       </a:r>
                       <a:endParaRPr lang="en-US" sz="950" dirty="0">
                         <a:latin typeface="Meiryo" charset="0"/>
@@ -13771,7 +13806,7 @@
                           <a:ea typeface="Meiryo" pitchFamily="34" charset="-122"/>
                           <a:cs typeface="Meiryo" pitchFamily="34" charset="-120"/>
                         </a:rPr>
-                        <a:t>発表済み・番号未特定</a:t>
+                        <a:t>対応中（EMSR916）</a:t>
                       </a:r>
                       <a:endParaRPr lang="en-US" sz="900" dirty="0">
                         <a:latin typeface="Meiryo" charset="0"/>
@@ -13833,13 +13868,13 @@
                       <a:r>
                         <a:rPr lang="en-US" sz="850" b="1" dirty="0">
                           <a:solidFill>
-                            <a:srgbClr val="B8860B"/>
+                            <a:srgbClr val="1E7A34"/>
                           </a:solidFill>
                           <a:latin typeface="Meiryo" pitchFamily="34" charset="0"/>
                           <a:ea typeface="Meiryo" pitchFamily="34" charset="-122"/>
                           <a:cs typeface="Meiryo" pitchFamily="34" charset="-120"/>
                         </a:rPr>
-                        <a:t>報道</a:t>
+                        <a:t>公式</a:t>
                       </a:r>
                       <a:endParaRPr lang="en-US" sz="850" dirty="0">
                         <a:latin typeface="Meiryo" charset="0"/>
@@ -15161,7 +15196,7 @@
                   </a:extLst>
                 </a:hlinkClick>
               </a:rPr>
-              <a:t>コペルニクスEMS ラピッドマッピング</a:t>
+              <a:t>コペルニクスEMS EMSR916「Earthquake in Colombia」（発動）</a:t>
             </a:r>
             <a:pPr algn="l" indent="0" marL="0">
               <a:buNone/>
@@ -23064,7 +23099,7 @@
                           <a:ea typeface="Meiryo" pitchFamily="34" charset="-122"/>
                           <a:cs typeface="Meiryo" pitchFamily="34" charset="-120"/>
                         </a:rPr>
-                        <a:t>コペルニクスEMS ラピッドマッピング</a:t>
+                        <a:t>コペルニクスEMS EMSR916「Earthquake in Colombia」（発動）</a:t>
                       </a:r>
                       <a:endParaRPr lang="en-US" sz="950" dirty="0">
                         <a:latin typeface="Meiryo" charset="0"/>
@@ -23207,7 +23242,7 @@
                             </a:extLst>
                           </a:hlinkClick>
                         </a:rPr>
-                        <a:t>https://emergency.copernicus.eu/mapping/list-of-activations-rapid</a:t>
+                        <a:t>https://mapping.emergency.copernicus.eu/activations/EMSR916/</a:t>
                       </a:r>
                       <a:endParaRPr lang="en-US" sz="800" dirty="0">
                         <a:latin typeface="Meiryo" charset="0"/>
@@ -33261,7 +33296,7 @@
                           <a:ea typeface="Meiryo" pitchFamily="34" charset="-122"/>
                           <a:cs typeface="Meiryo" pitchFamily="34" charset="-120"/>
                         </a:rPr>
-                        <a:t>午後</a:t>
+                        <a:t>12:13</a:t>
                       </a:r>
                       <a:endParaRPr lang="en-US" sz="1000" dirty="0">
                         <a:latin typeface="Meiryo" charset="0"/>
@@ -33329,7 +33364,7 @@
                           <a:ea typeface="Meiryo" pitchFamily="34" charset="-122"/>
                           <a:cs typeface="Meiryo" pitchFamily="34" charset="-120"/>
                         </a:rPr>
-                        <a:t>政府の第1次被害報告：死者111人、負傷者87人。住宅損壊1,575棟、全壊37棟、建物倒壊61棟。医療施設18、教育施設52、コミュニティ施設17、幹線道路18、地方空港6か所に被害。</a:t>
+                        <a:t>コペルニクスEMSのラピッドマッピングが EMSR916 として発動（17:13 UTC）。要請は欧州委員会サービス／DG ECHO、地震被害評価のマッピングのため。</a:t>
                       </a:r>
                       <a:endParaRPr lang="en-US" sz="950" dirty="0">
                         <a:latin typeface="Meiryo" charset="0"/>
@@ -33397,7 +33432,7 @@
                           <a:ea typeface="Meiryo" pitchFamily="34" charset="-122"/>
                           <a:cs typeface="Meiryo" pitchFamily="34" charset="-120"/>
                         </a:rPr>
-                        <a:t>大統領府／UNGRD</a:t>
+                        <a:t>Copernicus EMS</a:t>
                       </a:r>
                       <a:endParaRPr lang="en-US" sz="850" dirty="0">
                         <a:latin typeface="Meiryo" charset="0"/>
@@ -33535,7 +33570,7 @@
                           <a:ea typeface="Meiryo" pitchFamily="34" charset="-122"/>
                           <a:cs typeface="Meiryo" pitchFamily="34" charset="-120"/>
                         </a:rPr>
-                        <a:t>エクアドルが救助犬を含む47人のUSARチームを動員。メキシコなど各国が支援を表明し、外務省とUNGRDを通じて受け入れる方針。</a:t>
+                        <a:t>政府の第1次被害報告：死者111人、負傷者87人。住宅損壊1,575棟、全壊37棟、建物倒壊61棟。医療施設18、教育施設52、コミュニティ施設17、幹線道路18、地方空港6か所に被害。</a:t>
                       </a:r>
                       <a:endParaRPr lang="en-US" sz="950" dirty="0">
                         <a:latin typeface="Meiryo" charset="0"/>
@@ -33597,13 +33632,13 @@
                       <a:r>
                         <a:rPr lang="en-US" sz="850" b="1" dirty="0">
                           <a:solidFill>
-                            <a:srgbClr val="B8860B"/>
+                            <a:srgbClr val="1E7A34"/>
                           </a:solidFill>
                           <a:latin typeface="Meiryo" pitchFamily="34" charset="0"/>
                           <a:ea typeface="Meiryo" pitchFamily="34" charset="-122"/>
                           <a:cs typeface="Meiryo" pitchFamily="34" charset="-120"/>
                         </a:rPr>
-                        <a:t>国際報道</a:t>
+                        <a:t>大統領府／UNGRD</a:t>
                       </a:r>
                       <a:endParaRPr lang="en-US" sz="850" dirty="0">
                         <a:latin typeface="Meiryo" charset="0"/>
@@ -33673,7 +33708,7 @@
                           <a:ea typeface="Meiryo" pitchFamily="34" charset="-122"/>
                           <a:cs typeface="Meiryo" pitchFamily="34" charset="-120"/>
                         </a:rPr>
-                        <a:t>同日</a:t>
+                        <a:t>午後</a:t>
                       </a:r>
                       <a:endParaRPr lang="en-US" sz="1000" dirty="0">
                         <a:latin typeface="Meiryo" charset="0"/>
@@ -33741,7 +33776,7 @@
                           <a:ea typeface="Meiryo" pitchFamily="34" charset="-122"/>
                           <a:cs typeface="Meiryo" pitchFamily="34" charset="-120"/>
                         </a:rPr>
-                        <a:t>国際災害チャーター（Space and Major Disasters）の発動およびコペルニクス緊急管理サービスの動員が報じられている。詳細は確認中。</a:t>
+                        <a:t>エクアドルが救助犬を含む47人のUSARチームを動員。メキシコなど各国が支援を表明し、外務省とUNGRDを通じて受け入れる方針。</a:t>
                       </a:r>
                       <a:endParaRPr lang="en-US" sz="950" dirty="0">
                         <a:latin typeface="Meiryo" charset="0"/>
@@ -33803,13 +33838,13 @@
                       <a:r>
                         <a:rPr lang="en-US" sz="850" b="1" dirty="0">
                           <a:solidFill>
-                            <a:srgbClr val="888888"/>
+                            <a:srgbClr val="B8860B"/>
                           </a:solidFill>
                           <a:latin typeface="Meiryo" pitchFamily="34" charset="0"/>
                           <a:ea typeface="Meiryo" pitchFamily="34" charset="-122"/>
                           <a:cs typeface="Meiryo" pitchFamily="34" charset="-120"/>
                         </a:rPr>
-                        <a:t>チャーター／コペルニクス</a:t>
+                        <a:t>国際報道</a:t>
                       </a:r>
                       <a:endParaRPr lang="en-US" sz="850" dirty="0">
                         <a:latin typeface="Meiryo" charset="0"/>
